--- a/lesson-utils/mitchs-web-server-lecture.pptx
+++ b/lesson-utils/mitchs-web-server-lecture.pptx
@@ -3324,7 +3324,7 @@
             <a:fld id="{64E16E12-DE15-4A0C-8F49-EF6CF4C04CB8}" type="datetime1">
               <a:rPr lang="en-US" altLang="en-US"/>
               <a:pPr/>
-              <a:t>2/28/2023</a:t>
+              <a:t>11/18/2025</a:t>
             </a:fld>
             <a:endParaRPr lang="en-US" altLang="en-US"/>
           </a:p>
@@ -3541,7 +3541,7 @@
             <a:fld id="{E762676E-69AB-460C-AE90-ECEA8E5AAB15}" type="datetime1">
               <a:rPr lang="en-US" altLang="en-US"/>
               <a:pPr/>
-              <a:t>2/28/2023</a:t>
+              <a:t>11/18/2025</a:t>
             </a:fld>
             <a:endParaRPr lang="en-US" altLang="en-US"/>
           </a:p>
@@ -3763,7 +3763,7 @@
             <a:fld id="{D28AB012-E68C-4DA7-8F0C-15BAF31228DC}" type="datetime1">
               <a:rPr lang="en-US" altLang="en-US"/>
               <a:pPr/>
-              <a:t>2/28/2023</a:t>
+              <a:t>11/18/2025</a:t>
             </a:fld>
             <a:endParaRPr lang="en-US" altLang="en-US"/>
           </a:p>
@@ -3975,7 +3975,7 @@
             <a:fld id="{A8E65493-96E1-4EA2-9842-E0710FBB3101}" type="datetime1">
               <a:rPr lang="en-US" altLang="en-US"/>
               <a:pPr/>
-              <a:t>2/28/2023</a:t>
+              <a:t>11/18/2025</a:t>
             </a:fld>
             <a:endParaRPr lang="en-US" altLang="en-US"/>
           </a:p>
@@ -4210,7 +4210,7 @@
             <a:fld id="{FAA141BC-F3A4-465D-B947-6E83D4EB1EC1}" type="datetime1">
               <a:rPr lang="en-US" altLang="en-US"/>
               <a:pPr/>
-              <a:t>2/28/2023</a:t>
+              <a:t>11/18/2025</a:t>
             </a:fld>
             <a:endParaRPr lang="en-US" altLang="en-US"/>
           </a:p>
@@ -4489,7 +4489,7 @@
             <a:fld id="{F47263E3-BA61-4D43-A9F6-2FF33359115F}" type="datetime1">
               <a:rPr lang="en-US" altLang="en-US"/>
               <a:pPr/>
-              <a:t>2/28/2023</a:t>
+              <a:t>11/18/2025</a:t>
             </a:fld>
             <a:endParaRPr lang="en-US" altLang="en-US"/>
           </a:p>
@@ -4915,7 +4915,7 @@
             <a:fld id="{C941CDE7-8B25-41A8-8BE7-FC2C11776738}" type="datetime1">
               <a:rPr lang="en-US" altLang="en-US"/>
               <a:pPr/>
-              <a:t>2/28/2023</a:t>
+              <a:t>11/18/2025</a:t>
             </a:fld>
             <a:endParaRPr lang="en-US" altLang="en-US"/>
           </a:p>
@@ -5070,7 +5070,7 @@
             <a:fld id="{A3A87F7B-8129-40AD-B52B-EC6545FEB5B7}" type="datetime1">
               <a:rPr lang="en-US" altLang="en-US"/>
               <a:pPr/>
-              <a:t>2/28/2023</a:t>
+              <a:t>11/18/2025</a:t>
             </a:fld>
             <a:endParaRPr lang="en-US" altLang="en-US"/>
           </a:p>
@@ -5197,7 +5197,7 @@
             <a:fld id="{C600D1E5-742B-4790-82C0-83BADE7E806A}" type="datetime1">
               <a:rPr lang="en-US" altLang="en-US"/>
               <a:pPr/>
-              <a:t>2/28/2023</a:t>
+              <a:t>11/18/2025</a:t>
             </a:fld>
             <a:endParaRPr lang="en-US" altLang="en-US"/>
           </a:p>
@@ -5522,7 +5522,7 @@
             <a:fld id="{6E927ED5-8E66-4DE6-9035-8505B1C83E8F}" type="datetime1">
               <a:rPr lang="en-US" altLang="en-US"/>
               <a:pPr/>
-              <a:t>2/28/2023</a:t>
+              <a:t>11/18/2025</a:t>
             </a:fld>
             <a:endParaRPr lang="en-US" altLang="en-US"/>
           </a:p>
@@ -5827,7 +5827,7 @@
             <a:fld id="{17E1982A-0868-4A6A-A562-A8B2DCC3B882}" type="datetime1">
               <a:rPr lang="en-US" altLang="en-US"/>
               <a:pPr/>
-              <a:t>2/28/2023</a:t>
+              <a:t>11/18/2025</a:t>
             </a:fld>
             <a:endParaRPr lang="en-US" altLang="en-US"/>
           </a:p>
@@ -7031,7 +7031,7 @@
             <a:fld id="{4CBDD98B-AAEC-4FBB-9B26-2F129FEF0CAA}" type="datetime1">
               <a:rPr lang="en-US" altLang="en-US"/>
               <a:pPr/>
-              <a:t>2/28/2023</a:t>
+              <a:t>11/18/2025</a:t>
             </a:fld>
             <a:endParaRPr lang="en-US" altLang="en-US"/>
           </a:p>
@@ -7635,6 +7635,10 @@
           </p:nvPr>
         </p:nvSpPr>
         <p:spPr>
+          <a:xfrm>
+            <a:off x="373711" y="3886200"/>
+            <a:ext cx="8396578" cy="1143000"/>
+          </a:xfrm>
           <a:noFill/>
           <a:ln/>
         </p:spPr>
@@ -7644,7 +7648,7 @@
           <a:p>
             <a:r>
               <a:rPr lang="en-US" altLang="en-US" dirty="0"/>
-              <a:t>Mitch Just Talks for Nine Hours About Nothing</a:t>
+              <a:t>Andrew Just Talks for Nine Hours About Nothing</a:t>
             </a:r>
           </a:p>
         </p:txBody>
@@ -9219,8 +9223,8 @@
           </a:p>
         </p:txBody>
       </p:sp>
-      <mc:AlternateContent xmlns:mc="http://schemas.openxmlformats.org/markup-compatibility/2006">
-        <mc:Choice xmlns:p14="http://schemas.microsoft.com/office/powerpoint/2010/main" Requires="p14">
+      <mc:AlternateContent xmlns:mc="http://schemas.openxmlformats.org/markup-compatibility/2006" xmlns:p14="http://schemas.microsoft.com/office/powerpoint/2010/main">
+        <mc:Choice Requires="p14">
           <p:contentPart p14:bwMode="auto" r:id="rId4">
             <p14:nvContentPartPr>
               <p14:cNvPr id="11" name="Ink 10">
@@ -9239,7 +9243,7 @@
             </p14:xfrm>
           </p:contentPart>
         </mc:Choice>
-        <mc:Fallback>
+        <mc:Fallback xmlns="">
           <p:pic>
             <p:nvPicPr>
               <p:cNvPr id="11" name="Ink 10">
@@ -9270,8 +9274,8 @@
           </p:pic>
         </mc:Fallback>
       </mc:AlternateContent>
-      <mc:AlternateContent xmlns:mc="http://schemas.openxmlformats.org/markup-compatibility/2006">
-        <mc:Choice xmlns:p14="http://schemas.microsoft.com/office/powerpoint/2010/main" Requires="p14">
+      <mc:AlternateContent xmlns:mc="http://schemas.openxmlformats.org/markup-compatibility/2006" xmlns:p14="http://schemas.microsoft.com/office/powerpoint/2010/main">
+        <mc:Choice Requires="p14">
           <p:contentPart p14:bwMode="auto" r:id="rId6">
             <p14:nvContentPartPr>
               <p14:cNvPr id="12" name="Ink 11">
@@ -9290,7 +9294,7 @@
             </p14:xfrm>
           </p:contentPart>
         </mc:Choice>
-        <mc:Fallback>
+        <mc:Fallback xmlns="">
           <p:pic>
             <p:nvPicPr>
               <p:cNvPr id="12" name="Ink 11">
@@ -9341,8 +9345,8 @@
             <a:chExt cx="6125040" cy="3821040"/>
           </a:xfrm>
         </p:grpSpPr>
-        <mc:AlternateContent xmlns:mc="http://schemas.openxmlformats.org/markup-compatibility/2006">
-          <mc:Choice xmlns:p14="http://schemas.microsoft.com/office/powerpoint/2010/main" Requires="p14">
+        <mc:AlternateContent xmlns:mc="http://schemas.openxmlformats.org/markup-compatibility/2006" xmlns:p14="http://schemas.microsoft.com/office/powerpoint/2010/main">
+          <mc:Choice Requires="p14">
             <p:contentPart p14:bwMode="auto" r:id="rId7">
               <p14:nvContentPartPr>
                 <p14:cNvPr id="8" name="Ink 7">
@@ -9361,7 +9365,7 @@
               </p14:xfrm>
             </p:contentPart>
           </mc:Choice>
-          <mc:Fallback>
+          <mc:Fallback xmlns="">
             <p:pic>
               <p:nvPicPr>
                 <p:cNvPr id="8" name="Ink 7">
@@ -9392,8 +9396,8 @@
             </p:pic>
           </mc:Fallback>
         </mc:AlternateContent>
-        <mc:AlternateContent xmlns:mc="http://schemas.openxmlformats.org/markup-compatibility/2006">
-          <mc:Choice xmlns:p14="http://schemas.microsoft.com/office/powerpoint/2010/main" Requires="p14">
+        <mc:AlternateContent xmlns:mc="http://schemas.openxmlformats.org/markup-compatibility/2006" xmlns:p14="http://schemas.microsoft.com/office/powerpoint/2010/main">
+          <mc:Choice Requires="p14">
             <p:contentPart p14:bwMode="auto" r:id="rId9">
               <p14:nvContentPartPr>
                 <p14:cNvPr id="9" name="Ink 8">
@@ -9412,7 +9416,7 @@
               </p14:xfrm>
             </p:contentPart>
           </mc:Choice>
-          <mc:Fallback>
+          <mc:Fallback xmlns="">
             <p:pic>
               <p:nvPicPr>
                 <p:cNvPr id="9" name="Ink 8">
@@ -9443,8 +9447,8 @@
             </p:pic>
           </mc:Fallback>
         </mc:AlternateContent>
-        <mc:AlternateContent xmlns:mc="http://schemas.openxmlformats.org/markup-compatibility/2006">
-          <mc:Choice xmlns:p14="http://schemas.microsoft.com/office/powerpoint/2010/main" Requires="p14">
+        <mc:AlternateContent xmlns:mc="http://schemas.openxmlformats.org/markup-compatibility/2006" xmlns:p14="http://schemas.microsoft.com/office/powerpoint/2010/main">
+          <mc:Choice Requires="p14">
             <p:contentPart p14:bwMode="auto" r:id="rId11">
               <p14:nvContentPartPr>
                 <p14:cNvPr id="17" name="Ink 16">
@@ -9463,7 +9467,7 @@
               </p14:xfrm>
             </p:contentPart>
           </mc:Choice>
-          <mc:Fallback>
+          <mc:Fallback xmlns="">
             <p:pic>
               <p:nvPicPr>
                 <p:cNvPr id="17" name="Ink 16">
@@ -9495,8 +9499,8 @@
           </mc:Fallback>
         </mc:AlternateContent>
       </p:grpSp>
-      <mc:AlternateContent xmlns:mc="http://schemas.openxmlformats.org/markup-compatibility/2006">
-        <mc:Choice xmlns:p14="http://schemas.microsoft.com/office/powerpoint/2010/main" Requires="p14">
+      <mc:AlternateContent xmlns:mc="http://schemas.openxmlformats.org/markup-compatibility/2006" xmlns:p14="http://schemas.microsoft.com/office/powerpoint/2010/main">
+        <mc:Choice Requires="p14">
           <p:contentPart p14:bwMode="auto" r:id="rId13">
             <p14:nvContentPartPr>
               <p14:cNvPr id="21" name="Ink 20">
@@ -9515,7 +9519,7 @@
             </p14:xfrm>
           </p:contentPart>
         </mc:Choice>
-        <mc:Fallback>
+        <mc:Fallback xmlns="">
           <p:pic>
             <p:nvPicPr>
               <p:cNvPr id="21" name="Ink 20">
